--- a/내일은행_MVP제안서_발표.pptx
+++ b/내일은행_MVP제안서_발표.pptx
@@ -4449,7 +4449,7 @@
               </a:defRPr>
             </a:pPr>
             <a:r>
-              <a:t>★ 키스톤: 운영대행 계약상 선지급 허용 + 정산데이터 여신활용 적법근거</a:t>
+              <a:t>★ 키스톤: 운영대행 계약상 선지급 허용 + 소상공인 명시 동의(여신활용·자동상계)</a:t>
             </a:r>
           </a:p>
           <a:p>
@@ -6264,7 +6264,7 @@
               </a:defRPr>
             </a:pPr>
             <a:r>
-              <a:t>신용평가/대출이 아니라</a:t>
+              <a:t>선지급 = 시장이 검증한</a:t>
             </a:r>
           </a:p>
           <a:p>
@@ -6279,7 +6279,7 @@
               </a:defRPr>
             </a:pPr>
             <a:r>
-              <a:t>'확정 채권의 시간차 브릿지'</a:t>
+              <a:t>'확정채권 담보 단기여신' 구조</a:t>
             </a:r>
           </a:p>
           <a:p>
@@ -6306,7 +6306,7 @@
               </a:defRPr>
             </a:pPr>
             <a:r>
-              <a:t>→ 회수 위험↓ · 규제 부담↓</a:t>
+              <a:t>→ 혁신은 AI 관계금융 레이어</a:t>
             </a:r>
           </a:p>
         </p:txBody>
@@ -6792,7 +6792,7 @@
               </a:defRPr>
             </a:pPr>
             <a:r>
-              <a:t>원칙: AI는 추천·설명, 최종 승인은 규칙엔진/은행원 (고영향 AI 인간 최종판단)</a:t>
+              <a:t>원칙: 한도는 기계 산식 · AI는 위험 발견·설명, 최종 승인은 규칙엔진/은행원 (인간 최종판단)</a:t>
             </a:r>
           </a:p>
         </p:txBody>
@@ -6923,7 +6923,7 @@
             </a:r>
             <a:br/>
             <a:r>
-              <a:t>→ 회수확률 · 추천한도 · 위험플래그</a:t>
+              <a:t>→ 한도(기계 산식) · 위험신호·플래그</a:t>
             </a:r>
           </a:p>
         </p:txBody>
@@ -8683,7 +8683,7 @@
               </a:defRPr>
             </a:pPr>
             <a:r>
-              <a:t>선지급률 = 정산예정액 × (1-환불률-버퍼)</a:t>
+              <a:t>선지급액 = 정산예정액 × (1-haircut)</a:t>
             </a:r>
           </a:p>
           <a:p>
@@ -8698,7 +8698,7 @@
               </a:defRPr>
             </a:pPr>
             <a:r>
-              <a:t>예: 300만 → 276만 haircut</a:t>
+              <a:t>예: 300만 → 276만 (이자는 분리·별도)</a:t>
             </a:r>
           </a:p>
         </p:txBody>
@@ -8859,7 +8859,7 @@
               </a:defRPr>
             </a:pPr>
             <a:r>
-              <a:t>• 3단계 신호 (자동승인/검토/미달) + SHAP 근거</a:t>
+              <a:t>• 3단계 신호 (스크리닝/위험플래그/결격) + SHAP 근거</a:t>
             </a:r>
           </a:p>
           <a:p>
@@ -8874,7 +8874,7 @@
               </a:defRPr>
             </a:pPr>
             <a:r>
-              <a:t>• 한도 슬라이더 ↔ 회수확률 실시간 연동</a:t>
+              <a:t>• 한도 슬라이더 ↔ 위험·회수확률 표시</a:t>
             </a:r>
           </a:p>
           <a:p>
@@ -9536,7 +9536,7 @@
               </a:defRPr>
             </a:pPr>
             <a:r>
-              <a:t>판단: 회수확률 → 선지급률 산출 (GBM+SHAP)</a:t>
+              <a:t>판단: 한도=기계 산식 · 위험 라우팅 (GBM+SHAP)</a:t>
             </a:r>
           </a:p>
         </p:txBody>
@@ -10715,7 +10715,7 @@
               </a:defRPr>
             </a:pPr>
             <a:r>
-              <a:t>회수확률·한도 산출</a:t>
+              <a:t>기계 한도·위험 신호</a:t>
             </a:r>
           </a:p>
         </p:txBody>
@@ -11233,7 +11233,7 @@
               </a:defRPr>
             </a:pPr>
             <a:r>
-              <a:t>→ 판단: 회수확률 96%</a:t>
+              <a:t>→ 판단: 스크리닝 통과 · 96%</a:t>
             </a:r>
           </a:p>
           <a:p>
@@ -11248,7 +11248,7 @@
               </a:defRPr>
             </a:pPr>
             <a:r>
-              <a:t>→ 행동: 276만원 선지급 추천</a:t>
+              <a:t>→ 행동: 276만원 선지급 집행</a:t>
             </a:r>
           </a:p>
           <a:p>
@@ -11654,7 +11654,7 @@
               </a:defRPr>
             </a:pPr>
             <a:r>
-              <a:t>매출 이상 감지 → 선지급 보류</a:t>
+              <a:t>이상 감지 → 은행원 검토 → 보류</a:t>
             </a:r>
           </a:p>
           <a:p>
@@ -12320,7 +12320,7 @@
               </a:defRPr>
             </a:pPr>
             <a:r>
-              <a:t>        + 입출금 + 상권정보 공공 API</a:t>
+              <a:t xml:space="preserve">        + 입출금 + 상권정보 공공 API</a:t>
             </a:r>
           </a:p>
           <a:p>
@@ -12362,7 +12362,7 @@
               </a:defRPr>
             </a:pPr>
             <a:r>
-              <a:t>           + 합성 정산/거래 데이터 생성</a:t>
+              <a:t xml:space="preserve">           + 합성 정산/거래 데이터 생성</a:t>
             </a:r>
           </a:p>
         </p:txBody>
@@ -12523,7 +12523,7 @@
               </a:defRPr>
             </a:pPr>
             <a:r>
-              <a:t>회수확률·추천한도: LightGBM + SHAP</a:t>
+              <a:t>회수확률(위험 신호): LightGBM + SHAP</a:t>
             </a:r>
           </a:p>
           <a:p>
@@ -12989,7 +12989,7 @@
               </a:defRPr>
             </a:pPr>
             <a:r>
-              <a:t>haircut (환불률 반영)</a:t>
+              <a:t>haircut(채권평가감)·이자 분리</a:t>
             </a:r>
           </a:p>
           <a:p>
